--- a/Success Plan - Meridian Health Systems.pptx
+++ b/Success Plan - Meridian Health Systems.pptx
@@ -2905,7 +2905,7 @@
                 <a:ea typeface="Calibri" pitchFamily="34" charset="-122"/>
                 <a:cs typeface="Calibri" pitchFamily="34" charset="-120"/>
               </a:rPr>
-              <a:t>ADOPTION</a:t>
+              <a:t>TIME SAVED</a:t>
             </a:r>
             <a:endParaRPr lang="en-US" sz="1050" dirty="0"/>
           </a:p>
@@ -2944,7 +2944,7 @@
                 <a:ea typeface="Cambria" pitchFamily="34" charset="-122"/>
                 <a:cs typeface="Cambria" pitchFamily="34" charset="-120"/>
               </a:rPr>
-              <a:t>640 / 900</a:t>
+              <a:t>14 / 30</a:t>
             </a:r>
             <a:endParaRPr lang="en-US" sz="2600" dirty="0"/>
           </a:p>
@@ -2983,7 +2983,7 @@
                 <a:ea typeface="Calibri" pitchFamily="34" charset="-122"/>
                 <a:cs typeface="Calibri" pitchFamily="34" charset="-120"/>
               </a:rPr>
-              <a:t>Weekly active clinical users (users)</a:t>
+              <a:t>Patient onboarding time reduction (% reduction)</a:t>
             </a:r>
             <a:endParaRPr lang="en-US" sz="1050" dirty="0"/>
           </a:p>
@@ -3049,7 +3049,7 @@
                 <a:ea typeface="Calibri" pitchFamily="34" charset="-122"/>
                 <a:cs typeface="Calibri" pitchFamily="34" charset="-120"/>
               </a:rPr>
-              <a:t>ONBOARDING</a:t>
+              <a:t>PROCESS SIMPLIFIED</a:t>
             </a:r>
             <a:endParaRPr lang="en-US" sz="1050" dirty="0"/>
           </a:p>
@@ -3088,7 +3088,7 @@
                 <a:ea typeface="Cambria" pitchFamily="34" charset="-122"/>
                 <a:cs typeface="Cambria" pitchFamily="34" charset="-120"/>
               </a:rPr>
-              <a:t>42 / 30</a:t>
+              <a:t>1 / 3</a:t>
             </a:r>
             <a:endParaRPr lang="en-US" sz="2600" dirty="0"/>
           </a:p>
@@ -3127,7 +3127,7 @@
                 <a:ea typeface="Calibri" pitchFamily="34" charset="-122"/>
                 <a:cs typeface="Calibri" pitchFamily="34" charset="-120"/>
               </a:rPr>
-              <a:t>Time-to-first-value (days)</a:t>
+              <a:t>Legacy scheduling tools consolidated (tools)</a:t>
             </a:r>
             <a:endParaRPr lang="en-US" sz="1050" dirty="0"/>
           </a:p>
@@ -3193,7 +3193,7 @@
                 <a:ea typeface="Calibri" pitchFamily="34" charset="-122"/>
                 <a:cs typeface="Calibri" pitchFamily="34" charset="-120"/>
               </a:rPr>
-              <a:t>BUSINESS IMPACT</a:t>
+              <a:t>COST REDUCTION</a:t>
             </a:r>
             <a:endParaRPr lang="en-US" sz="1050" dirty="0"/>
           </a:p>
@@ -3232,7 +3232,7 @@
                 <a:ea typeface="Cambria" pitchFamily="34" charset="-122"/>
                 <a:cs typeface="Cambria" pitchFamily="34" charset="-120"/>
               </a:rPr>
-              <a:t>14 / 30</a:t>
+              <a:t>$42,000 / $75,000</a:t>
             </a:r>
             <a:endParaRPr lang="en-US" sz="2600" dirty="0"/>
           </a:p>
@@ -3271,7 +3271,7 @@
                 <a:ea typeface="Calibri" pitchFamily="34" charset="-122"/>
                 <a:cs typeface="Calibri" pitchFamily="34" charset="-120"/>
               </a:rPr>
-              <a:t>Patient onboarding time reduction (% reduction)</a:t>
+              <a:t>Administrative cost savings (per year)</a:t>
             </a:r>
             <a:endParaRPr lang="en-US" sz="1050" dirty="0"/>
           </a:p>
@@ -3420,7 +3420,7 @@
                 <a:ea typeface="Calibri" pitchFamily="34" charset="-122"/>
                 <a:cs typeface="Calibri" pitchFamily="34" charset="-120"/>
               </a:rPr>
-              <a:t>TSIA COMPONENT 1</a:t>
+              <a:t>SECTION 1</a:t>
             </a:r>
             <a:endParaRPr lang="en-US" sz="1200" dirty="0"/>
           </a:p>
@@ -4467,7 +4467,7 @@
                 <a:ea typeface="Calibri" pitchFamily="34" charset="-122"/>
                 <a:cs typeface="Calibri" pitchFamily="34" charset="-120"/>
               </a:rPr>
-              <a:t>TSIA COMPONENT 2</a:t>
+              <a:t>SECTION 2</a:t>
             </a:r>
             <a:endParaRPr lang="en-US" sz="1200" dirty="0"/>
           </a:p>
@@ -5091,7 +5091,7 @@
                 <a:ea typeface="Calibri" pitchFamily="34" charset="-122"/>
                 <a:cs typeface="Calibri" pitchFamily="34" charset="-120"/>
               </a:rPr>
-              <a:t>TSIA COMPONENT 3</a:t>
+              <a:t>SECTION 3</a:t>
             </a:r>
             <a:endParaRPr lang="en-US" sz="1200" dirty="0"/>
           </a:p>
@@ -6306,7 +6306,7 @@
                 <a:ea typeface="Calibri" pitchFamily="34" charset="-122"/>
                 <a:cs typeface="Calibri" pitchFamily="34" charset="-120"/>
               </a:rPr>
-              <a:t>TSIA COMPONENT 4</a:t>
+              <a:t>SECTION 4</a:t>
             </a:r>
             <a:endParaRPr lang="en-US" sz="1200" dirty="0"/>
           </a:p>
@@ -6360,7 +6360,7 @@
         <p:spPr>
           <a:xfrm>
             <a:off x="548640" y="1508760"/>
-            <a:ext cx="3657600" cy="2743200"/>
+            <a:ext cx="3398520" cy="2743200"/>
           </a:xfrm>
           <a:prstGeom prst="roundRect">
             <a:avLst>
@@ -6387,7 +6387,7 @@
         <p:spPr>
           <a:xfrm>
             <a:off x="822960" y="1737360"/>
-            <a:ext cx="3108960" cy="274320"/>
+            <a:ext cx="2849880" cy="274320"/>
           </a:xfrm>
           <a:prstGeom prst="rect">
             <a:avLst/>
@@ -6411,7 +6411,7 @@
                 <a:ea typeface="Calibri" pitchFamily="34" charset="-122"/>
                 <a:cs typeface="Calibri" pitchFamily="34" charset="-120"/>
               </a:rPr>
-              <a:t>ADOPTION</a:t>
+              <a:t>TIME SAVED</a:t>
             </a:r>
             <a:endParaRPr lang="en-US" sz="1100" dirty="0"/>
           </a:p>
@@ -6426,7 +6426,7 @@
         <p:spPr>
           <a:xfrm>
             <a:off x="822960" y="2011680"/>
-            <a:ext cx="3108960" cy="320040"/>
+            <a:ext cx="2849880" cy="320040"/>
           </a:xfrm>
           <a:prstGeom prst="rect">
             <a:avLst/>
@@ -6450,7 +6450,7 @@
                 <a:ea typeface="Calibri" pitchFamily="34" charset="-122"/>
                 <a:cs typeface="Calibri" pitchFamily="34" charset="-120"/>
               </a:rPr>
-              <a:t>Active usage of the platform</a:t>
+              <a:t>Hours or cycle time given back to the customer</a:t>
             </a:r>
             <a:endParaRPr lang="en-US" sz="1000" dirty="0"/>
           </a:p>
@@ -6465,7 +6465,7 @@
         <p:spPr>
           <a:xfrm>
             <a:off x="822960" y="2286000"/>
-            <a:ext cx="3108960" cy="365760"/>
+            <a:ext cx="2849880" cy="365760"/>
           </a:xfrm>
           <a:prstGeom prst="rect">
             <a:avLst/>
@@ -6489,7 +6489,7 @@
                 <a:ea typeface="Calibri" pitchFamily="34" charset="-122"/>
                 <a:cs typeface="Calibri" pitchFamily="34" charset="-120"/>
               </a:rPr>
-              <a:t>Weekly active clinical users</a:t>
+              <a:t>Patient onboarding time reduction</a:t>
             </a:r>
             <a:endParaRPr lang="en-US" sz="1200" dirty="0"/>
           </a:p>
@@ -6504,7 +6504,7 @@
         <p:spPr>
           <a:xfrm>
             <a:off x="822960" y="2606040"/>
-            <a:ext cx="3108960" cy="594360"/>
+            <a:ext cx="2849880" cy="594360"/>
           </a:xfrm>
           <a:prstGeom prst="rect">
             <a:avLst/>
@@ -6528,7 +6528,7 @@
                 <a:ea typeface="Cambria" pitchFamily="34" charset="-122"/>
                 <a:cs typeface="Cambria" pitchFamily="34" charset="-120"/>
               </a:rPr>
-              <a:t>640</a:t>
+              <a:t>14</a:t>
             </a:r>
             <a:endParaRPr lang="en-US" sz="3400" dirty="0"/>
           </a:p>
@@ -6543,7 +6543,7 @@
         <p:spPr>
           <a:xfrm>
             <a:off x="822960" y="3182112"/>
-            <a:ext cx="3108960" cy="274320"/>
+            <a:ext cx="2849880" cy="274320"/>
           </a:xfrm>
           <a:prstGeom prst="rect">
             <a:avLst/>
@@ -6567,7 +6567,7 @@
                 <a:ea typeface="Calibri" pitchFamily="34" charset="-122"/>
                 <a:cs typeface="Calibri" pitchFamily="34" charset="-120"/>
               </a:rPr>
-              <a:t>of 900 users target</a:t>
+              <a:t>of 30 % reduction target</a:t>
             </a:r>
             <a:endParaRPr lang="en-US" sz="1050" dirty="0"/>
           </a:p>
@@ -6582,7 +6582,7 @@
         <p:spPr>
           <a:xfrm>
             <a:off x="822960" y="3547872"/>
-            <a:ext cx="3108960" cy="201168"/>
+            <a:ext cx="2849880" cy="201168"/>
           </a:xfrm>
           <a:prstGeom prst="roundRect">
             <a:avLst>
@@ -6604,7 +6604,7 @@
         <p:spPr>
           <a:xfrm>
             <a:off x="822960" y="3547872"/>
-            <a:ext cx="2207362" cy="201168"/>
+            <a:ext cx="1339444" cy="201168"/>
           </a:xfrm>
           <a:prstGeom prst="roundRect">
             <a:avLst>
@@ -6612,7 +6612,7 @@
             </a:avLst>
           </a:prstGeom>
           <a:solidFill>
-            <a:srgbClr val="B7791F"/>
+            <a:srgbClr val="B4312F"/>
           </a:solidFill>
           <a:ln/>
         </p:spPr>
@@ -6626,7 +6626,7 @@
         <p:spPr>
           <a:xfrm>
             <a:off x="822960" y="3794760"/>
-            <a:ext cx="3108960" cy="274320"/>
+            <a:ext cx="2849880" cy="274320"/>
           </a:xfrm>
           <a:prstGeom prst="rect">
             <a:avLst/>
@@ -6650,7 +6650,7 @@
                 <a:ea typeface="Calibri" pitchFamily="34" charset="-122"/>
                 <a:cs typeface="Calibri" pitchFamily="34" charset="-120"/>
               </a:rPr>
-              <a:t>71% of target</a:t>
+              <a:t>47% of target</a:t>
             </a:r>
             <a:endParaRPr lang="en-US" sz="950" dirty="0"/>
           </a:p>
@@ -6664,8 +6664,8 @@
         </p:nvSpPr>
         <p:spPr>
           <a:xfrm>
-            <a:off x="4434840" y="1508760"/>
-            <a:ext cx="3657600" cy="2743200"/>
+            <a:off x="4175760" y="1508760"/>
+            <a:ext cx="3398520" cy="2743200"/>
           </a:xfrm>
           <a:prstGeom prst="roundRect">
             <a:avLst>
@@ -6691,8 +6691,8 @@
         </p:nvSpPr>
         <p:spPr>
           <a:xfrm>
-            <a:off x="4709160" y="1737360"/>
-            <a:ext cx="3108960" cy="274320"/>
+            <a:off x="4450080" y="1737360"/>
+            <a:ext cx="2849880" cy="274320"/>
           </a:xfrm>
           <a:prstGeom prst="rect">
             <a:avLst/>
@@ -6716,7 +6716,7 @@
                 <a:ea typeface="Calibri" pitchFamily="34" charset="-122"/>
                 <a:cs typeface="Calibri" pitchFamily="34" charset="-120"/>
               </a:rPr>
-              <a:t>ONBOARDING</a:t>
+              <a:t>PROCESS SIMPLIFIED</a:t>
             </a:r>
             <a:endParaRPr lang="en-US" sz="1100" dirty="0"/>
           </a:p>
@@ -6730,8 +6730,8 @@
         </p:nvSpPr>
         <p:spPr>
           <a:xfrm>
-            <a:off x="4709160" y="2011680"/>
-            <a:ext cx="3108960" cy="320040"/>
+            <a:off x="4450080" y="2011680"/>
+            <a:ext cx="2849880" cy="320040"/>
           </a:xfrm>
           <a:prstGeom prst="rect">
             <a:avLst/>
@@ -6755,7 +6755,7 @@
                 <a:ea typeface="Calibri" pitchFamily="34" charset="-122"/>
                 <a:cs typeface="Calibri" pitchFamily="34" charset="-120"/>
               </a:rPr>
-              <a:t>Speed to first value</a:t>
+              <a:t>Steps, tools, or manual work removed</a:t>
             </a:r>
             <a:endParaRPr lang="en-US" sz="1000" dirty="0"/>
           </a:p>
@@ -6769,8 +6769,8 @@
         </p:nvSpPr>
         <p:spPr>
           <a:xfrm>
-            <a:off x="4709160" y="2286000"/>
-            <a:ext cx="3108960" cy="365760"/>
+            <a:off x="4450080" y="2286000"/>
+            <a:ext cx="2849880" cy="365760"/>
           </a:xfrm>
           <a:prstGeom prst="rect">
             <a:avLst/>
@@ -6794,7 +6794,7 @@
                 <a:ea typeface="Calibri" pitchFamily="34" charset="-122"/>
                 <a:cs typeface="Calibri" pitchFamily="34" charset="-120"/>
               </a:rPr>
-              <a:t>Time-to-first-value</a:t>
+              <a:t>Legacy scheduling tools consolidated</a:t>
             </a:r>
             <a:endParaRPr lang="en-US" sz="1200" dirty="0"/>
           </a:p>
@@ -6808,8 +6808,8 @@
         </p:nvSpPr>
         <p:spPr>
           <a:xfrm>
-            <a:off x="4709160" y="2606040"/>
-            <a:ext cx="3108960" cy="594360"/>
+            <a:off x="4450080" y="2606040"/>
+            <a:ext cx="2849880" cy="594360"/>
           </a:xfrm>
           <a:prstGeom prst="rect">
             <a:avLst/>
@@ -6833,7 +6833,7 @@
                 <a:ea typeface="Cambria" pitchFamily="34" charset="-122"/>
                 <a:cs typeface="Cambria" pitchFamily="34" charset="-120"/>
               </a:rPr>
-              <a:t>42</a:t>
+              <a:t>1</a:t>
             </a:r>
             <a:endParaRPr lang="en-US" sz="3400" dirty="0"/>
           </a:p>
@@ -6847,8 +6847,8 @@
         </p:nvSpPr>
         <p:spPr>
           <a:xfrm>
-            <a:off x="4709160" y="3182112"/>
-            <a:ext cx="3108960" cy="274320"/>
+            <a:off x="4450080" y="3182112"/>
+            <a:ext cx="2849880" cy="274320"/>
           </a:xfrm>
           <a:prstGeom prst="rect">
             <a:avLst/>
@@ -6872,7 +6872,7 @@
                 <a:ea typeface="Calibri" pitchFamily="34" charset="-122"/>
                 <a:cs typeface="Calibri" pitchFamily="34" charset="-120"/>
               </a:rPr>
-              <a:t>of 30 days target</a:t>
+              <a:t>of 3 tools target</a:t>
             </a:r>
             <a:endParaRPr lang="en-US" sz="1050" dirty="0"/>
           </a:p>
@@ -6886,8 +6886,8 @@
         </p:nvSpPr>
         <p:spPr>
           <a:xfrm>
-            <a:off x="4709160" y="3547872"/>
-            <a:ext cx="3108960" cy="201168"/>
+            <a:off x="4450080" y="3547872"/>
+            <a:ext cx="2849880" cy="201168"/>
           </a:xfrm>
           <a:prstGeom prst="roundRect">
             <a:avLst>
@@ -6908,8 +6908,8 @@
         </p:nvSpPr>
         <p:spPr>
           <a:xfrm>
-            <a:off x="4709160" y="3547872"/>
-            <a:ext cx="3108960" cy="201168"/>
+            <a:off x="4450080" y="3547872"/>
+            <a:ext cx="940460" cy="201168"/>
           </a:xfrm>
           <a:prstGeom prst="roundRect">
             <a:avLst>
@@ -6917,7 +6917,7 @@
             </a:avLst>
           </a:prstGeom>
           <a:solidFill>
-            <a:srgbClr val="1E8A5F"/>
+            <a:srgbClr val="B4312F"/>
           </a:solidFill>
           <a:ln/>
         </p:spPr>
@@ -6930,8 +6930,8 @@
         </p:nvSpPr>
         <p:spPr>
           <a:xfrm>
-            <a:off x="4709160" y="3794760"/>
-            <a:ext cx="3108960" cy="274320"/>
+            <a:off x="4450080" y="3794760"/>
+            <a:ext cx="2849880" cy="274320"/>
           </a:xfrm>
           <a:prstGeom prst="rect">
             <a:avLst/>
@@ -6955,7 +6955,7 @@
                 <a:ea typeface="Calibri" pitchFamily="34" charset="-122"/>
                 <a:cs typeface="Calibri" pitchFamily="34" charset="-120"/>
               </a:rPr>
-              <a:t>100% of target</a:t>
+              <a:t>33% of target</a:t>
             </a:r>
             <a:endParaRPr lang="en-US" sz="950" dirty="0"/>
           </a:p>
@@ -6969,8 +6969,8 @@
         </p:nvSpPr>
         <p:spPr>
           <a:xfrm>
-            <a:off x="8321040" y="1508760"/>
-            <a:ext cx="3657600" cy="2743200"/>
+            <a:off x="7802880" y="1508760"/>
+            <a:ext cx="3398520" cy="2743200"/>
           </a:xfrm>
           <a:prstGeom prst="roundRect">
             <a:avLst>
@@ -6996,8 +6996,8 @@
         </p:nvSpPr>
         <p:spPr>
           <a:xfrm>
-            <a:off x="8595360" y="1737360"/>
-            <a:ext cx="3108960" cy="274320"/>
+            <a:off x="8077200" y="1737360"/>
+            <a:ext cx="2849880" cy="274320"/>
           </a:xfrm>
           <a:prstGeom prst="rect">
             <a:avLst/>
@@ -7021,7 +7021,7 @@
                 <a:ea typeface="Calibri" pitchFamily="34" charset="-122"/>
                 <a:cs typeface="Calibri" pitchFamily="34" charset="-120"/>
               </a:rPr>
-              <a:t>BUSINESS IMPACT</a:t>
+              <a:t>COST REDUCTION</a:t>
             </a:r>
             <a:endParaRPr lang="en-US" sz="1100" dirty="0"/>
           </a:p>
@@ -7035,8 +7035,8 @@
         </p:nvSpPr>
         <p:spPr>
           <a:xfrm>
-            <a:off x="8595360" y="2011680"/>
-            <a:ext cx="3108960" cy="320040"/>
+            <a:off x="8077200" y="2011680"/>
+            <a:ext cx="2849880" cy="320040"/>
           </a:xfrm>
           <a:prstGeom prst="rect">
             <a:avLst/>
@@ -7060,7 +7060,7 @@
                 <a:ea typeface="Calibri" pitchFamily="34" charset="-122"/>
                 <a:cs typeface="Calibri" pitchFamily="34" charset="-120"/>
               </a:rPr>
-              <a:t>Outcomes tied to ROI</a:t>
+              <a:t>Spend avoided or reduced for the customer</a:t>
             </a:r>
             <a:endParaRPr lang="en-US" sz="1000" dirty="0"/>
           </a:p>
@@ -7074,8 +7074,8 @@
         </p:nvSpPr>
         <p:spPr>
           <a:xfrm>
-            <a:off x="8595360" y="2286000"/>
-            <a:ext cx="3108960" cy="365760"/>
+            <a:off x="8077200" y="2286000"/>
+            <a:ext cx="2849880" cy="365760"/>
           </a:xfrm>
           <a:prstGeom prst="rect">
             <a:avLst/>
@@ -7099,7 +7099,7 @@
                 <a:ea typeface="Calibri" pitchFamily="34" charset="-122"/>
                 <a:cs typeface="Calibri" pitchFamily="34" charset="-120"/>
               </a:rPr>
-              <a:t>Patient onboarding time reduction</a:t>
+              <a:t>Administrative cost savings</a:t>
             </a:r>
             <a:endParaRPr lang="en-US" sz="1200" dirty="0"/>
           </a:p>
@@ -7113,8 +7113,8 @@
         </p:nvSpPr>
         <p:spPr>
           <a:xfrm>
-            <a:off x="8595360" y="2606040"/>
-            <a:ext cx="3108960" cy="594360"/>
+            <a:off x="8077200" y="2606040"/>
+            <a:ext cx="2849880" cy="594360"/>
           </a:xfrm>
           <a:prstGeom prst="rect">
             <a:avLst/>
@@ -7138,7 +7138,7 @@
                 <a:ea typeface="Cambria" pitchFamily="34" charset="-122"/>
                 <a:cs typeface="Cambria" pitchFamily="34" charset="-120"/>
               </a:rPr>
-              <a:t>14</a:t>
+              <a:t>$42,000</a:t>
             </a:r>
             <a:endParaRPr lang="en-US" sz="3400" dirty="0"/>
           </a:p>
@@ -7152,8 +7152,8 @@
         </p:nvSpPr>
         <p:spPr>
           <a:xfrm>
-            <a:off x="8595360" y="3182112"/>
-            <a:ext cx="3108960" cy="274320"/>
+            <a:off x="8077200" y="3182112"/>
+            <a:ext cx="2849880" cy="274320"/>
           </a:xfrm>
           <a:prstGeom prst="rect">
             <a:avLst/>
@@ -7177,7 +7177,7 @@
                 <a:ea typeface="Calibri" pitchFamily="34" charset="-122"/>
                 <a:cs typeface="Calibri" pitchFamily="34" charset="-120"/>
               </a:rPr>
-              <a:t>of 30 % reduction target</a:t>
+              <a:t>of $75,000 per year target</a:t>
             </a:r>
             <a:endParaRPr lang="en-US" sz="1050" dirty="0"/>
           </a:p>
@@ -7191,8 +7191,8 @@
         </p:nvSpPr>
         <p:spPr>
           <a:xfrm>
-            <a:off x="8595360" y="3547872"/>
-            <a:ext cx="3108960" cy="201168"/>
+            <a:off x="8077200" y="3547872"/>
+            <a:ext cx="2849880" cy="201168"/>
           </a:xfrm>
           <a:prstGeom prst="roundRect">
             <a:avLst>
@@ -7213,8 +7213,8 @@
         </p:nvSpPr>
         <p:spPr>
           <a:xfrm>
-            <a:off x="8595360" y="3547872"/>
-            <a:ext cx="1461211" cy="201168"/>
+            <a:off x="8077200" y="3547872"/>
+            <a:ext cx="1595933" cy="201168"/>
           </a:xfrm>
           <a:prstGeom prst="roundRect">
             <a:avLst>
@@ -7235,8 +7235,8 @@
         </p:nvSpPr>
         <p:spPr>
           <a:xfrm>
-            <a:off x="8595360" y="3794760"/>
-            <a:ext cx="3108960" cy="274320"/>
+            <a:off x="8077200" y="3794760"/>
+            <a:ext cx="2849880" cy="274320"/>
           </a:xfrm>
           <a:prstGeom prst="rect">
             <a:avLst/>
@@ -7260,7 +7260,7 @@
                 <a:ea typeface="Calibri" pitchFamily="34" charset="-122"/>
                 <a:cs typeface="Calibri" pitchFamily="34" charset="-120"/>
               </a:rPr>
-              <a:t>47% of target</a:t>
+              <a:t>56% of target</a:t>
             </a:r>
             <a:endParaRPr lang="en-US" sz="950" dirty="0"/>
           </a:p>
@@ -7299,7 +7299,7 @@
                 <a:ea typeface="Calibri" pitchFamily="34" charset="-122"/>
                 <a:cs typeface="Calibri" pitchFamily="34" charset="-120"/>
               </a:rPr>
-              <a:t>Metric definitions follow TSIA guidance: adoption (active users / feature usage), onboarding (time-to-value, activation), and business impact (ROI, outcomes).</a:t>
+              <a:t>Metrics are tracked in the terms that matter to the customer: time saved, cost avoided, revenue enabled, or complexity removed from their operations.</a:t>
             </a:r>
             <a:endParaRPr lang="en-US" sz="1050" dirty="0"/>
           </a:p>
@@ -7448,7 +7448,7 @@
                 <a:ea typeface="Calibri" pitchFamily="34" charset="-122"/>
                 <a:cs typeface="Calibri" pitchFamily="34" charset="-120"/>
               </a:rPr>
-              <a:t>TSIA COMPONENT 5</a:t>
+              <a:t>SECTION 5</a:t>
             </a:r>
             <a:endParaRPr lang="en-US" sz="1200" dirty="0"/>
           </a:p>
@@ -8256,7 +8256,7 @@
                 <a:ea typeface="Calibri" pitchFamily="34" charset="-122"/>
                 <a:cs typeface="Calibri" pitchFamily="34" charset="-120"/>
               </a:rPr>
-              <a:t>TSIA COMPONENT 6</a:t>
+              <a:t>SECTION 6</a:t>
             </a:r>
             <a:endParaRPr lang="en-US" sz="1200" dirty="0"/>
           </a:p>
